--- a/SS3_PartC_Presentation.pptx
+++ b/SS3_PartC_Presentation.pptx
@@ -121,21 +121,21 @@
   <p:extLst>
     <p:ext uri="{521415D9-36F7-43E2-AB2F-B90AF26B5E84}">
       <p14:sectionLst xmlns:p14="http://schemas.microsoft.com/office/powerpoint/2010/main">
-        <p14:section name="SS1" id="{8a32cdce-823d-9b23-f6fa-c822ae2c075c}">
+        <p14:section name="SS1" id="{6761d155-2d1b-60df-91de-0686fc529d7b}">
           <p14:sldIdLst>
             <p14:sldId id="257"/>
             <p14:sldId id="258"/>
             <p14:sldId id="259"/>
           </p14:sldIdLst>
         </p14:section>
-        <p14:section name="SS2" id="{58718380-89e9-d56f-3922-a0fffb99e42f}">
+        <p14:section name="SS2" id="{b729b604-a54e-1209-981d-3f9e16177a06}">
           <p14:sldIdLst>
             <p14:sldId id="260"/>
             <p14:sldId id="261"/>
             <p14:sldId id="262"/>
           </p14:sldIdLst>
         </p14:section>
-        <p14:section name="SS3" id="{c4448285-cc64-8577-fe47-243997087100}">
+        <p14:section name="SS3" id="{8334ad6c-c484-19a8-d059-fcba364322fd}">
           <p14:sldIdLst>
             <p14:sldId id="263"/>
             <p14:sldId id="264"/>
@@ -146,7 +146,7 @@
             <p14:sldId id="269"/>
           </p14:sldIdLst>
         </p14:section>
-        <p14:section name="Default-1" id="{38a6db32-4e5e-4d53-df05-889326bf1cd3}">
+        <p14:section name="Default-1" id="{6b560f18-626b-c318-0602-f99f36f27fbc}">
           <p14:sldIdLst>
             <p14:sldId id="270"/>
           </p14:sldIdLst>
@@ -2358,7 +2358,7 @@
 
 <file path=ppt/slideLayouts/slideLayout4.xml><?xml version="1.0" encoding="utf-8"?>
 <p:sldLayout xmlns:a="http://schemas.openxmlformats.org/drawingml/2006/main" xmlns:r="http://schemas.openxmlformats.org/officeDocument/2006/relationships" xmlns:p="http://schemas.openxmlformats.org/presentationml/2006/main" preserve="1">
-  <p:cSld name="CONTENT_LIGHT">
+  <p:cSld name="CONTENT_TEXT">
     <p:bg>
       <p:bgPr>
         <a:solidFill>
@@ -2464,18 +2464,50 @@
           </a:p>
         </p:txBody>
       </p:sp>
-      <p:sp>
-        <p:nvSpPr>
-          <p:cNvPr id="4" name="Text 0"/>
+    </p:spTree>
+  </p:cSld>
+  <p:clrMapOvr>
+    <a:masterClrMapping/>
+  </p:clrMapOvr>
+</p:sldLayout>
+</file>
+
+<file path=ppt/slideLayouts/slideLayout5.xml><?xml version="1.0" encoding="utf-8"?>
+<p:sldLayout xmlns:a="http://schemas.openxmlformats.org/drawingml/2006/main" xmlns:r="http://schemas.openxmlformats.org/officeDocument/2006/relationships" xmlns:p="http://schemas.openxmlformats.org/presentationml/2006/main" preserve="1">
+  <p:cSld name="CONTENT_EXHIBIT">
+    <p:bg>
+      <p:bgPr>
+        <a:solidFill>
+          <a:srgbClr val="FFFFFF"/>
+        </a:solidFill>
+      </p:bgPr>
+    </p:bg>
+    <p:spTree>
+      <p:nvGrpSpPr>
+        <p:cNvPr id="1" name=""/>
+        <p:cNvGrpSpPr/>
+        <p:nvPr/>
+      </p:nvGrpSpPr>
+      <p:grpSpPr>
+        <a:xfrm>
+          <a:off x="0" y="0"/>
+          <a:ext cx="0" cy="0"/>
+          <a:chOff x="0" y="0"/>
+          <a:chExt cx="0" cy="0"/>
+        </a:xfrm>
+      </p:grpSpPr>
+      <p:sp>
+        <p:nvSpPr>
+          <p:cNvPr id="2" name="Text 0"/>
           <p:cNvSpPr/>
           <p:nvPr>
-            <p:ph idx="102" type="body" hasCustomPrompt="1"/>
-          </p:nvPr>
-        </p:nvSpPr>
-        <p:spPr>
-          <a:xfrm>
-            <a:off x="548640" y="1417320"/>
-            <a:ext cx="11064240" cy="4937760"/>
+            <p:ph idx="100" type="title" hasCustomPrompt="1"/>
+          </p:nvPr>
+        </p:nvSpPr>
+        <p:spPr>
+          <a:xfrm>
+            <a:off x="548640" y="411480"/>
+            <a:ext cx="11064240" cy="822960"/>
           </a:xfrm>
           <a:prstGeom prst="rect">
             <a:avLst/>
@@ -2486,51 +2518,23 @@
         <p:txBody>
           <a:bodyPr wrap="square" rtlCol="0"/>
           <a:lstStyle>
-            <a:lvl1pPr indent="0" marL="0">
+            <a:lvl1pPr algn="l" indent="0" marL="0">
               <a:buNone/>
-              <a:defRPr lang="en-US" dirty="0"/>
+              <a:defRPr lang="en-US" sz="3000" b="1" dirty="0">
+                <a:solidFill>
+                  <a:schemeClr val="tx2"/>
+                </a:solidFill>
+                <a:latin typeface="Cambria" pitchFamily="34" charset="0"/>
+                <a:ea typeface="Cambria" pitchFamily="34" charset="-122"/>
+                <a:cs typeface="Cambria" pitchFamily="34" charset="-120"/>
+              </a:defRPr>
             </a:lvl1pPr>
           </a:lstStyle>
           <a:p>
-            <a:pPr indent="0" marL="0">
+            <a:pPr algn="l" indent="0" marL="0">
               <a:buNone/>
             </a:pPr>
-            <a:endParaRPr lang="en-US" dirty="0"/>
-          </a:p>
-        </p:txBody>
-      </p:sp>
-      <p:sp>
-        <p:nvSpPr>
-          <p:cNvPr id="5" name="Text 0"/>
-          <p:cNvSpPr/>
-          <p:nvPr>
-            <p:ph idx="103" type="body" hasCustomPrompt="1"/>
-          </p:nvPr>
-        </p:nvSpPr>
-        <p:spPr>
-          <a:xfrm>
-            <a:off x="548640" y="1417320"/>
-            <a:ext cx="11064240" cy="4937760"/>
-          </a:xfrm>
-          <a:prstGeom prst="rect">
-            <a:avLst/>
-          </a:prstGeom>
-          <a:noFill/>
-          <a:ln/>
-        </p:spPr>
-        <p:txBody>
-          <a:bodyPr wrap="square" rtlCol="0"/>
-          <a:lstStyle>
-            <a:lvl1pPr indent="0" marL="0">
-              <a:buNone/>
-              <a:defRPr lang="en-US" dirty="0"/>
-            </a:lvl1pPr>
-          </a:lstStyle>
-          <a:p>
-            <a:pPr indent="0" marL="0">
-              <a:buNone/>
-            </a:pPr>
-            <a:endParaRPr lang="en-US" dirty="0"/>
+            <a:endParaRPr lang="en-US" sz="3000" dirty="0"/>
           </a:p>
         </p:txBody>
       </p:sp>
@@ -2567,6 +2571,7 @@
     <p:sldLayoutId id="2147483650" r:id="rId2"/>
     <p:sldLayoutId id="2147483651" r:id="rId3"/>
     <p:sldLayoutId id="2147483652" r:id="rId4"/>
+    <p:sldLayoutId id="2147483653" r:id="rId5"/>
   </p:sldLayoutIdLst>
   <p:hf sldNum="0" hdr="0" ftr="0" dt="0"/>
   <p:txStyles>
@@ -3125,66 +3130,6 @@
           </a:p>
         </p:txBody>
       </p:sp>
-      <p:sp>
-        <p:nvSpPr>
-          <p:cNvPr id="4" name="Text 0"/>
-          <p:cNvSpPr/>
-          <p:nvPr>
-            <p:ph idx="102" type="body" hasCustomPrompt="1"/>
-          </p:nvPr>
-        </p:nvSpPr>
-        <p:spPr>
-          <a:xfrm>
-            <a:off x="548640" y="1417320"/>
-            <a:ext cx="11064240" cy="4937760"/>
-          </a:xfrm>
-          <a:prstGeom prst="rect">
-            <a:avLst/>
-          </a:prstGeom>
-          <a:noFill/>
-          <a:ln/>
-        </p:spPr>
-        <p:txBody>
-          <a:bodyPr wrap="square" rtlCol="0"/>
-          <a:lstStyle/>
-          <a:p>
-            <a:pPr indent="0" marL="0">
-              <a:buNone/>
-            </a:pPr>
-            <a:endParaRPr lang="en-US" dirty="0"/>
-          </a:p>
-        </p:txBody>
-      </p:sp>
-      <p:sp>
-        <p:nvSpPr>
-          <p:cNvPr id="5" name="Text 0"/>
-          <p:cNvSpPr/>
-          <p:nvPr>
-            <p:ph idx="103" type="body" hasCustomPrompt="1"/>
-          </p:nvPr>
-        </p:nvSpPr>
-        <p:spPr>
-          <a:xfrm>
-            <a:off x="548640" y="1417320"/>
-            <a:ext cx="11064240" cy="4937760"/>
-          </a:xfrm>
-          <a:prstGeom prst="rect">
-            <a:avLst/>
-          </a:prstGeom>
-          <a:noFill/>
-          <a:ln/>
-        </p:spPr>
-        <p:txBody>
-          <a:bodyPr wrap="square" rtlCol="0"/>
-          <a:lstStyle/>
-          <a:p>
-            <a:pPr indent="0" marL="0">
-              <a:buNone/>
-            </a:pPr>
-            <a:endParaRPr lang="en-US" dirty="0"/>
-          </a:p>
-        </p:txBody>
-      </p:sp>
     </p:spTree>
   </p:cSld>
   <p:clrMapOvr>
@@ -3251,15 +3196,52 @@
           </a:p>
         </p:txBody>
       </p:sp>
+      <p:sp>
+        <p:nvSpPr>
+          <p:cNvPr id="3" name="Text 1"/>
+          <p:cNvSpPr txBox="1"/>
+          <p:nvPr/>
+        </p:nvSpPr>
+        <p:spPr>
+          <a:xfrm>
+            <a:off x="548640" y="1417320"/>
+            <a:ext cx="11064240" cy="457200"/>
+          </a:xfrm>
+          <a:prstGeom prst="rect">
+            <a:avLst/>
+          </a:prstGeom>
+          <a:noFill/>
+          <a:ln/>
+        </p:spPr>
+        <p:txBody>
+          <a:bodyPr wrap="square" rtlCol="0" anchor="t"/>
+          <a:lstStyle/>
+          <a:p>
+            <a:pPr indent="0" marL="0">
+              <a:buNone/>
+            </a:pPr>
+            <a:r>
+              <a:rPr lang="en-US" sz="1500" dirty="0">
+                <a:solidFill>
+                  <a:srgbClr val="1A1033"/>
+                </a:solidFill>
+                <a:latin typeface="Calibri" pitchFamily="34" charset="0"/>
+                <a:ea typeface="Calibri" pitchFamily="34" charset="-122"/>
+                <a:cs typeface="Calibri" pitchFamily="34" charset="-120"/>
+              </a:rPr>
+              <a:t>Test set: accuracy 0.858, recall 0.906, ROC-AUC 0.950. The single biggest predictor is days since a household's last viewing activity, exactly the kind of signal a retention team can act on and explain.</a:t>
+            </a:r>
+            <a:endParaRPr lang="en-US" sz="1500" dirty="0"/>
+          </a:p>
+        </p:txBody>
+      </p:sp>
       <p:pic>
         <p:nvPicPr>
-          <p:cNvPr id="3" name="Image 0" descr="../../../../../Desktop/CAP182_SS1/experimental_results/ss3_part_b_results.png">    </p:cNvPr>
+          <p:cNvPr id="4" name="Image 0" descr="../../../../../Desktop/CAP182_SS1/experimental_results/ss3_part_b_results.png">    </p:cNvPr>
           <p:cNvPicPr>
             <a:picLocks noChangeAspect="1"/>
           </p:cNvPicPr>
-          <p:nvPr>
-            <p:ph idx="103" type="body" hasCustomPrompt="1"/>
-          </p:nvPr>
+          <p:nvPr/>
         </p:nvPicPr>
         <p:blipFill>
           <a:blip r:embed="rId1"/>
@@ -3268,7 +3250,7 @@
         </p:blipFill>
         <p:spPr>
           <a:xfrm>
-            <a:off x="548640" y="1417320"/>
+            <a:off x="548640" y="1828800"/>
             <a:ext cx="11064240" cy="3566160"/>
           </a:xfrm>
           <a:prstGeom prst="rect">
@@ -3276,77 +3258,6 @@
           </a:prstGeom>
         </p:spPr>
       </p:pic>
-      <p:sp>
-        <p:nvSpPr>
-          <p:cNvPr id="4" name="Text 0"/>
-          <p:cNvSpPr/>
-          <p:nvPr>
-            <p:ph idx="101" type="body" hasCustomPrompt="1"/>
-          </p:nvPr>
-        </p:nvSpPr>
-        <p:spPr>
-          <a:xfrm>
-            <a:off x="548640" y="1417320"/>
-            <a:ext cx="11064240" cy="4937760"/>
-          </a:xfrm>
-          <a:prstGeom prst="rect">
-            <a:avLst/>
-          </a:prstGeom>
-          <a:noFill/>
-          <a:ln/>
-        </p:spPr>
-        <p:txBody>
-          <a:bodyPr wrap="square" rtlCol="0"/>
-          <a:lstStyle/>
-          <a:p>
-            <a:pPr algn="l" indent="0" marL="0">
-              <a:buNone/>
-            </a:pPr>
-            <a:r>
-              <a:rPr lang="en-US" sz="1600" dirty="0">
-                <a:solidFill>
-                  <a:schemeClr val="tx1"/>
-                </a:solidFill>
-                <a:latin typeface="Calibri" pitchFamily="34" charset="0"/>
-                <a:ea typeface="Calibri" pitchFamily="34" charset="-122"/>
-                <a:cs typeface="Calibri" pitchFamily="34" charset="-120"/>
-              </a:rPr>
-              <a:t>Test set: accuracy 0.858, recall 0.906, ROC-AUC 0.950. The single biggest predictor is days since a household's last viewing activity, exactly the kind of signal a retention team can act on and explain.</a:t>
-            </a:r>
-            <a:endParaRPr lang="en-US" sz="1600" dirty="0"/>
-          </a:p>
-        </p:txBody>
-      </p:sp>
-      <p:sp>
-        <p:nvSpPr>
-          <p:cNvPr id="5" name="Text 0"/>
-          <p:cNvSpPr/>
-          <p:nvPr>
-            <p:ph idx="102" type="body" hasCustomPrompt="1"/>
-          </p:nvPr>
-        </p:nvSpPr>
-        <p:spPr>
-          <a:xfrm>
-            <a:off x="548640" y="1417320"/>
-            <a:ext cx="11064240" cy="4937760"/>
-          </a:xfrm>
-          <a:prstGeom prst="rect">
-            <a:avLst/>
-          </a:prstGeom>
-          <a:noFill/>
-          <a:ln/>
-        </p:spPr>
-        <p:txBody>
-          <a:bodyPr wrap="square" rtlCol="0"/>
-          <a:lstStyle/>
-          <a:p>
-            <a:pPr indent="0" marL="0">
-              <a:buNone/>
-            </a:pPr>
-            <a:endParaRPr lang="en-US" dirty="0"/>
-          </a:p>
-        </p:txBody>
-      </p:sp>
     </p:spTree>
   </p:cSld>
   <p:clrMapOvr>
@@ -3417,13 +3328,11 @@
         <p:nvGraphicFramePr>
           <p:cNvPr id="3" name="Chart 0" descr=""/>
           <p:cNvGraphicFramePr/>
-          <p:nvPr>
-            <p:ph idx="102" type="body" hasCustomPrompt="1"/>
-          </p:nvPr>
+          <p:nvPr/>
         </p:nvGraphicFramePr>
         <p:xfrm>
-          <a:off x="548640" y="1417320"/>
-          <a:ext cx="11064240" cy="4937760"/>
+          <a:off x="1645920" y="1554480"/>
+          <a:ext cx="8869680" cy="4206240"/>
         </p:xfrm>
         <a:graphic xmlns:a="http://schemas.openxmlformats.org/drawingml/2006/main">
           <a:graphicData uri="http://schemas.openxmlformats.org/drawingml/2006/chart">
@@ -3431,66 +3340,6 @@
           </a:graphicData>
         </a:graphic>
       </p:graphicFrame>
-      <p:sp>
-        <p:nvSpPr>
-          <p:cNvPr id="4" name="Text 0"/>
-          <p:cNvSpPr/>
-          <p:nvPr>
-            <p:ph idx="101" type="body" hasCustomPrompt="1"/>
-          </p:nvPr>
-        </p:nvSpPr>
-        <p:spPr>
-          <a:xfrm>
-            <a:off x="548640" y="1417320"/>
-            <a:ext cx="11064240" cy="4937760"/>
-          </a:xfrm>
-          <a:prstGeom prst="rect">
-            <a:avLst/>
-          </a:prstGeom>
-          <a:noFill/>
-          <a:ln/>
-        </p:spPr>
-        <p:txBody>
-          <a:bodyPr wrap="square" rtlCol="0"/>
-          <a:lstStyle/>
-          <a:p>
-            <a:pPr algn="l" indent="0" marL="0">
-              <a:buNone/>
-            </a:pPr>
-            <a:endParaRPr lang="en-US" sz="1600" dirty="0"/>
-          </a:p>
-        </p:txBody>
-      </p:sp>
-      <p:sp>
-        <p:nvSpPr>
-          <p:cNvPr id="5" name="Text 0"/>
-          <p:cNvSpPr/>
-          <p:nvPr>
-            <p:ph idx="103" type="body" hasCustomPrompt="1"/>
-          </p:nvPr>
-        </p:nvSpPr>
-        <p:spPr>
-          <a:xfrm>
-            <a:off x="548640" y="1417320"/>
-            <a:ext cx="11064240" cy="4937760"/>
-          </a:xfrm>
-          <a:prstGeom prst="rect">
-            <a:avLst/>
-          </a:prstGeom>
-          <a:noFill/>
-          <a:ln/>
-        </p:spPr>
-        <p:txBody>
-          <a:bodyPr wrap="square" rtlCol="0"/>
-          <a:lstStyle/>
-          <a:p>
-            <a:pPr indent="0" marL="0">
-              <a:buNone/>
-            </a:pPr>
-            <a:endParaRPr lang="en-US" dirty="0"/>
-          </a:p>
-        </p:txBody>
-      </p:sp>
     </p:spTree>
   </p:cSld>
   <p:clrMapOvr>
@@ -3665,66 +3514,6 @@
           </a:p>
         </p:txBody>
       </p:sp>
-      <p:sp>
-        <p:nvSpPr>
-          <p:cNvPr id="4" name="Text 0"/>
-          <p:cNvSpPr/>
-          <p:nvPr>
-            <p:ph idx="102" type="body" hasCustomPrompt="1"/>
-          </p:nvPr>
-        </p:nvSpPr>
-        <p:spPr>
-          <a:xfrm>
-            <a:off x="548640" y="1417320"/>
-            <a:ext cx="11064240" cy="4937760"/>
-          </a:xfrm>
-          <a:prstGeom prst="rect">
-            <a:avLst/>
-          </a:prstGeom>
-          <a:noFill/>
-          <a:ln/>
-        </p:spPr>
-        <p:txBody>
-          <a:bodyPr wrap="square" rtlCol="0"/>
-          <a:lstStyle/>
-          <a:p>
-            <a:pPr indent="0" marL="0">
-              <a:buNone/>
-            </a:pPr>
-            <a:endParaRPr lang="en-US" dirty="0"/>
-          </a:p>
-        </p:txBody>
-      </p:sp>
-      <p:sp>
-        <p:nvSpPr>
-          <p:cNvPr id="5" name="Text 0"/>
-          <p:cNvSpPr/>
-          <p:nvPr>
-            <p:ph idx="103" type="body" hasCustomPrompt="1"/>
-          </p:nvPr>
-        </p:nvSpPr>
-        <p:spPr>
-          <a:xfrm>
-            <a:off x="548640" y="1417320"/>
-            <a:ext cx="11064240" cy="4937760"/>
-          </a:xfrm>
-          <a:prstGeom prst="rect">
-            <a:avLst/>
-          </a:prstGeom>
-          <a:noFill/>
-          <a:ln/>
-        </p:spPr>
-        <p:txBody>
-          <a:bodyPr wrap="square" rtlCol="0"/>
-          <a:lstStyle/>
-          <a:p>
-            <a:pPr indent="0" marL="0">
-              <a:buNone/>
-            </a:pPr>
-            <a:endParaRPr lang="en-US" dirty="0"/>
-          </a:p>
-        </p:txBody>
-      </p:sp>
     </p:spTree>
   </p:cSld>
   <p:clrMapOvr>
@@ -3878,66 +3667,6 @@
           </a:p>
         </p:txBody>
       </p:sp>
-      <p:sp>
-        <p:nvSpPr>
-          <p:cNvPr id="4" name="Text 0"/>
-          <p:cNvSpPr/>
-          <p:nvPr>
-            <p:ph idx="102" type="body" hasCustomPrompt="1"/>
-          </p:nvPr>
-        </p:nvSpPr>
-        <p:spPr>
-          <a:xfrm>
-            <a:off x="548640" y="1417320"/>
-            <a:ext cx="11064240" cy="4937760"/>
-          </a:xfrm>
-          <a:prstGeom prst="rect">
-            <a:avLst/>
-          </a:prstGeom>
-          <a:noFill/>
-          <a:ln/>
-        </p:spPr>
-        <p:txBody>
-          <a:bodyPr wrap="square" rtlCol="0"/>
-          <a:lstStyle/>
-          <a:p>
-            <a:pPr indent="0" marL="0">
-              <a:buNone/>
-            </a:pPr>
-            <a:endParaRPr lang="en-US" dirty="0"/>
-          </a:p>
-        </p:txBody>
-      </p:sp>
-      <p:sp>
-        <p:nvSpPr>
-          <p:cNvPr id="5" name="Text 0"/>
-          <p:cNvSpPr/>
-          <p:nvPr>
-            <p:ph idx="103" type="body" hasCustomPrompt="1"/>
-          </p:nvPr>
-        </p:nvSpPr>
-        <p:spPr>
-          <a:xfrm>
-            <a:off x="548640" y="1417320"/>
-            <a:ext cx="11064240" cy="4937760"/>
-          </a:xfrm>
-          <a:prstGeom prst="rect">
-            <a:avLst/>
-          </a:prstGeom>
-          <a:noFill/>
-          <a:ln/>
-        </p:spPr>
-        <p:txBody>
-          <a:bodyPr wrap="square" rtlCol="0"/>
-          <a:lstStyle/>
-          <a:p>
-            <a:pPr indent="0" marL="0">
-              <a:buNone/>
-            </a:pPr>
-            <a:endParaRPr lang="en-US" dirty="0"/>
-          </a:p>
-        </p:txBody>
-      </p:sp>
     </p:spTree>
   </p:cSld>
   <p:clrMapOvr>
@@ -4579,66 +4308,6 @@
           </a:p>
         </p:txBody>
       </p:sp>
-      <p:sp>
-        <p:nvSpPr>
-          <p:cNvPr id="13" name="Text 0"/>
-          <p:cNvSpPr/>
-          <p:nvPr>
-            <p:ph idx="102" type="body" hasCustomPrompt="1"/>
-          </p:nvPr>
-        </p:nvSpPr>
-        <p:spPr>
-          <a:xfrm>
-            <a:off x="548640" y="1417320"/>
-            <a:ext cx="11064240" cy="4937760"/>
-          </a:xfrm>
-          <a:prstGeom prst="rect">
-            <a:avLst/>
-          </a:prstGeom>
-          <a:noFill/>
-          <a:ln/>
-        </p:spPr>
-        <p:txBody>
-          <a:bodyPr wrap="square" rtlCol="0"/>
-          <a:lstStyle/>
-          <a:p>
-            <a:pPr indent="0" marL="0">
-              <a:buNone/>
-            </a:pPr>
-            <a:endParaRPr lang="en-US" dirty="0"/>
-          </a:p>
-        </p:txBody>
-      </p:sp>
-      <p:sp>
-        <p:nvSpPr>
-          <p:cNvPr id="14" name="Text 0"/>
-          <p:cNvSpPr/>
-          <p:nvPr>
-            <p:ph idx="103" type="body" hasCustomPrompt="1"/>
-          </p:nvPr>
-        </p:nvSpPr>
-        <p:spPr>
-          <a:xfrm>
-            <a:off x="548640" y="1417320"/>
-            <a:ext cx="11064240" cy="4937760"/>
-          </a:xfrm>
-          <a:prstGeom prst="rect">
-            <a:avLst/>
-          </a:prstGeom>
-          <a:noFill/>
-          <a:ln/>
-        </p:spPr>
-        <p:txBody>
-          <a:bodyPr wrap="square" rtlCol="0"/>
-          <a:lstStyle/>
-          <a:p>
-            <a:pPr indent="0" marL="0">
-              <a:buNone/>
-            </a:pPr>
-            <a:endParaRPr lang="en-US" dirty="0"/>
-          </a:p>
-        </p:txBody>
-      </p:sp>
     </p:spTree>
   </p:cSld>
   <p:clrMapOvr>
@@ -4813,66 +4482,6 @@
           </a:p>
         </p:txBody>
       </p:sp>
-      <p:sp>
-        <p:nvSpPr>
-          <p:cNvPr id="4" name="Text 0"/>
-          <p:cNvSpPr/>
-          <p:nvPr>
-            <p:ph idx="102" type="body" hasCustomPrompt="1"/>
-          </p:nvPr>
-        </p:nvSpPr>
-        <p:spPr>
-          <a:xfrm>
-            <a:off x="548640" y="1417320"/>
-            <a:ext cx="11064240" cy="4937760"/>
-          </a:xfrm>
-          <a:prstGeom prst="rect">
-            <a:avLst/>
-          </a:prstGeom>
-          <a:noFill/>
-          <a:ln/>
-        </p:spPr>
-        <p:txBody>
-          <a:bodyPr wrap="square" rtlCol="0"/>
-          <a:lstStyle/>
-          <a:p>
-            <a:pPr indent="0" marL="0">
-              <a:buNone/>
-            </a:pPr>
-            <a:endParaRPr lang="en-US" dirty="0"/>
-          </a:p>
-        </p:txBody>
-      </p:sp>
-      <p:sp>
-        <p:nvSpPr>
-          <p:cNvPr id="5" name="Text 0"/>
-          <p:cNvSpPr/>
-          <p:nvPr>
-            <p:ph idx="103" type="body" hasCustomPrompt="1"/>
-          </p:nvPr>
-        </p:nvSpPr>
-        <p:spPr>
-          <a:xfrm>
-            <a:off x="548640" y="1417320"/>
-            <a:ext cx="11064240" cy="4937760"/>
-          </a:xfrm>
-          <a:prstGeom prst="rect">
-            <a:avLst/>
-          </a:prstGeom>
-          <a:noFill/>
-          <a:ln/>
-        </p:spPr>
-        <p:txBody>
-          <a:bodyPr wrap="square" rtlCol="0"/>
-          <a:lstStyle/>
-          <a:p>
-            <a:pPr indent="0" marL="0">
-              <a:buNone/>
-            </a:pPr>
-            <a:endParaRPr lang="en-US" dirty="0"/>
-          </a:p>
-        </p:txBody>
-      </p:sp>
     </p:spTree>
   </p:cSld>
   <p:clrMapOvr>
@@ -5133,66 +4742,6 @@
           </a:p>
         </p:txBody>
       </p:sp>
-      <p:sp>
-        <p:nvSpPr>
-          <p:cNvPr id="4" name="Text 0"/>
-          <p:cNvSpPr/>
-          <p:nvPr>
-            <p:ph idx="102" type="body" hasCustomPrompt="1"/>
-          </p:nvPr>
-        </p:nvSpPr>
-        <p:spPr>
-          <a:xfrm>
-            <a:off x="548640" y="1417320"/>
-            <a:ext cx="11064240" cy="4937760"/>
-          </a:xfrm>
-          <a:prstGeom prst="rect">
-            <a:avLst/>
-          </a:prstGeom>
-          <a:noFill/>
-          <a:ln/>
-        </p:spPr>
-        <p:txBody>
-          <a:bodyPr wrap="square" rtlCol="0"/>
-          <a:lstStyle/>
-          <a:p>
-            <a:pPr indent="0" marL="0">
-              <a:buNone/>
-            </a:pPr>
-            <a:endParaRPr lang="en-US" dirty="0"/>
-          </a:p>
-        </p:txBody>
-      </p:sp>
-      <p:sp>
-        <p:nvSpPr>
-          <p:cNvPr id="5" name="Text 0"/>
-          <p:cNvSpPr/>
-          <p:nvPr>
-            <p:ph idx="103" type="body" hasCustomPrompt="1"/>
-          </p:nvPr>
-        </p:nvSpPr>
-        <p:spPr>
-          <a:xfrm>
-            <a:off x="548640" y="1417320"/>
-            <a:ext cx="11064240" cy="4937760"/>
-          </a:xfrm>
-          <a:prstGeom prst="rect">
-            <a:avLst/>
-          </a:prstGeom>
-          <a:noFill/>
-          <a:ln/>
-        </p:spPr>
-        <p:txBody>
-          <a:bodyPr wrap="square" rtlCol="0"/>
-          <a:lstStyle/>
-          <a:p>
-            <a:pPr indent="0" marL="0">
-              <a:buNone/>
-            </a:pPr>
-            <a:endParaRPr lang="en-US" dirty="0"/>
-          </a:p>
-        </p:txBody>
-      </p:sp>
     </p:spTree>
   </p:cSld>
   <p:clrMapOvr>
@@ -5265,9 +4814,7 @@
           <p:cNvPicPr>
             <a:picLocks noChangeAspect="1"/>
           </p:cNvPicPr>
-          <p:nvPr>
-            <p:ph idx="103" type="body" hasCustomPrompt="1"/>
-          </p:nvPr>
+          <p:nvPr/>
         </p:nvPicPr>
         <p:blipFill>
           <a:blip r:embed="rId1"/>
@@ -5276,7 +4823,7 @@
         </p:blipFill>
         <p:spPr>
           <a:xfrm>
-            <a:off x="548640" y="1417320"/>
+            <a:off x="1463040" y="1508760"/>
             <a:ext cx="6035040" cy="4526280"/>
           </a:xfrm>
           <a:prstGeom prst="rect">
@@ -5403,66 +4950,6 @@
               <a:t>XGBoost is the method carried forward into SS3.</a:t>
             </a:r>
             <a:endParaRPr lang="en-US" sz="1600" dirty="0"/>
-          </a:p>
-        </p:txBody>
-      </p:sp>
-      <p:sp>
-        <p:nvSpPr>
-          <p:cNvPr id="5" name="Text 0"/>
-          <p:cNvSpPr/>
-          <p:nvPr>
-            <p:ph idx="101" type="body" hasCustomPrompt="1"/>
-          </p:nvPr>
-        </p:nvSpPr>
-        <p:spPr>
-          <a:xfrm>
-            <a:off x="548640" y="1417320"/>
-            <a:ext cx="11064240" cy="4937760"/>
-          </a:xfrm>
-          <a:prstGeom prst="rect">
-            <a:avLst/>
-          </a:prstGeom>
-          <a:noFill/>
-          <a:ln/>
-        </p:spPr>
-        <p:txBody>
-          <a:bodyPr wrap="square" rtlCol="0"/>
-          <a:lstStyle/>
-          <a:p>
-            <a:pPr algn="l" indent="0" marL="0">
-              <a:buNone/>
-            </a:pPr>
-            <a:endParaRPr lang="en-US" sz="1600" dirty="0"/>
-          </a:p>
-        </p:txBody>
-      </p:sp>
-      <p:sp>
-        <p:nvSpPr>
-          <p:cNvPr id="6" name="Text 0"/>
-          <p:cNvSpPr/>
-          <p:nvPr>
-            <p:ph idx="102" type="body" hasCustomPrompt="1"/>
-          </p:nvPr>
-        </p:nvSpPr>
-        <p:spPr>
-          <a:xfrm>
-            <a:off x="548640" y="1417320"/>
-            <a:ext cx="11064240" cy="4937760"/>
-          </a:xfrm>
-          <a:prstGeom prst="rect">
-            <a:avLst/>
-          </a:prstGeom>
-          <a:noFill/>
-          <a:ln/>
-        </p:spPr>
-        <p:txBody>
-          <a:bodyPr wrap="square" rtlCol="0"/>
-          <a:lstStyle/>
-          <a:p>
-            <a:pPr indent="0" marL="0">
-              <a:buNone/>
-            </a:pPr>
-            <a:endParaRPr lang="en-US" dirty="0"/>
           </a:p>
         </p:txBody>
       </p:sp>
@@ -6077,66 +5564,6 @@
               <a:t>Every number above was found by profiling the data directly, not assumed from the client's warning that it would be messy, then fixed with a documented reason for each step.</a:t>
             </a:r>
             <a:endParaRPr lang="en-US" sz="1600" dirty="0"/>
-          </a:p>
-        </p:txBody>
-      </p:sp>
-      <p:sp>
-        <p:nvSpPr>
-          <p:cNvPr id="16" name="Text 0"/>
-          <p:cNvSpPr/>
-          <p:nvPr>
-            <p:ph idx="102" type="body" hasCustomPrompt="1"/>
-          </p:nvPr>
-        </p:nvSpPr>
-        <p:spPr>
-          <a:xfrm>
-            <a:off x="548640" y="1417320"/>
-            <a:ext cx="11064240" cy="4937760"/>
-          </a:xfrm>
-          <a:prstGeom prst="rect">
-            <a:avLst/>
-          </a:prstGeom>
-          <a:noFill/>
-          <a:ln/>
-        </p:spPr>
-        <p:txBody>
-          <a:bodyPr wrap="square" rtlCol="0"/>
-          <a:lstStyle/>
-          <a:p>
-            <a:pPr indent="0" marL="0">
-              <a:buNone/>
-            </a:pPr>
-            <a:endParaRPr lang="en-US" dirty="0"/>
-          </a:p>
-        </p:txBody>
-      </p:sp>
-      <p:sp>
-        <p:nvSpPr>
-          <p:cNvPr id="17" name="Text 0"/>
-          <p:cNvSpPr/>
-          <p:nvPr>
-            <p:ph idx="103" type="body" hasCustomPrompt="1"/>
-          </p:nvPr>
-        </p:nvSpPr>
-        <p:spPr>
-          <a:xfrm>
-            <a:off x="548640" y="1417320"/>
-            <a:ext cx="11064240" cy="4937760"/>
-          </a:xfrm>
-          <a:prstGeom prst="rect">
-            <a:avLst/>
-          </a:prstGeom>
-          <a:noFill/>
-          <a:ln/>
-        </p:spPr>
-        <p:txBody>
-          <a:bodyPr wrap="square" rtlCol="0"/>
-          <a:lstStyle/>
-          <a:p>
-            <a:pPr indent="0" marL="0">
-              <a:buNone/>
-            </a:pPr>
-            <a:endParaRPr lang="en-US" dirty="0"/>
           </a:p>
         </p:txBody>
       </p:sp>
